--- a/Resources/CRM.pptx
+++ b/Resources/CRM.pptx
@@ -8,6 +8,11 @@
     <p:sldId id="256" r:id="rId2"/>
     <p:sldId id="257" r:id="rId3"/>
     <p:sldId id="258" r:id="rId4"/>
+    <p:sldId id="259" r:id="rId5"/>
+    <p:sldId id="260" r:id="rId6"/>
+    <p:sldId id="261" r:id="rId7"/>
+    <p:sldId id="262" r:id="rId8"/>
+    <p:sldId id="263" r:id="rId9"/>
   </p:sldIdLst>
   <p:sldSz cx="12192000" cy="6858000"/>
   <p:notesSz cx="6858000" cy="9144000"/>
@@ -108,7 +113,28 @@
   </p:defaultTextStyle>
   <p:extLst>
     <p:ext uri="{EFAFB233-063F-42B5-8137-9DF3F51BA10A}">
-      <p15:sldGuideLst xmlns:p15="http://schemas.microsoft.com/office/powerpoint/2012/main"/>
+      <p15:sldGuideLst xmlns:p15="http://schemas.microsoft.com/office/powerpoint/2012/main">
+        <p15:guide id="1" orient="horz" pos="2160" userDrawn="1">
+          <p15:clr>
+            <a:srgbClr val="A4A3A4"/>
+          </p15:clr>
+        </p15:guide>
+        <p15:guide id="2" pos="3840" userDrawn="1">
+          <p15:clr>
+            <a:srgbClr val="A4A3A4"/>
+          </p15:clr>
+        </p15:guide>
+        <p15:guide id="3" pos="3953" userDrawn="1">
+          <p15:clr>
+            <a:srgbClr val="A4A3A4"/>
+          </p15:clr>
+        </p15:guide>
+        <p15:guide id="4" orient="horz" pos="2260" userDrawn="1">
+          <p15:clr>
+            <a:srgbClr val="A4A3A4"/>
+          </p15:clr>
+        </p15:guide>
+      </p15:sldGuideLst>
     </p:ext>
   </p:extLst>
 </p:presentation>
@@ -162,7 +188,7 @@
           </a:lstStyle>
           <a:p>
             <a:r>
-              <a:rPr lang="ru-RU"/>
+              <a:rPr lang="ru-RU" dirty="0"/>
               <a:t>Образец заголовка</a:t>
             </a:r>
           </a:p>
@@ -232,7 +258,7 @@
           </a:lstStyle>
           <a:p>
             <a:r>
-              <a:rPr lang="ru-RU"/>
+              <a:rPr lang="ru-RU" dirty="0"/>
               <a:t>Образец подзаголовка</a:t>
             </a:r>
           </a:p>
@@ -261,7 +287,7 @@
           <a:p>
             <a:fld id="{DA8C586C-46CD-4213-A7C8-EE86E18B4B1F}" type="datetimeFigureOut">
               <a:rPr lang="ru-RU" smtClean="0"/>
-              <a:t>05.07.2026</a:t>
+              <a:t>28.07.2026</a:t>
             </a:fld>
             <a:endParaRPr lang="ru-RU"/>
           </a:p>
@@ -288,7 +314,7 @@
           <a:bodyPr/>
           <a:lstStyle/>
           <a:p>
-            <a:endParaRPr lang="ru-RU"/>
+            <a:endParaRPr lang="ru-RU" dirty="0"/>
           </a:p>
         </p:txBody>
       </p:sp>
@@ -331,6 +357,22 @@
   <p:clrMapOvr>
     <a:masterClrMapping/>
   </p:clrMapOvr>
+  <p:extLst>
+    <p:ext uri="{DCECCB84-F9BA-43D5-87BE-67443E8EF086}">
+      <p15:sldGuideLst xmlns:p15="http://schemas.microsoft.com/office/powerpoint/2012/main">
+        <p15:guide id="1" orient="horz" pos="2160" userDrawn="1">
+          <p15:clr>
+            <a:srgbClr val="FBAE40"/>
+          </p15:clr>
+        </p15:guide>
+        <p15:guide id="2" pos="3840" userDrawn="1">
+          <p15:clr>
+            <a:srgbClr val="FBAE40"/>
+          </p15:clr>
+        </p15:guide>
+      </p15:sldGuideLst>
+    </p:ext>
+  </p:extLst>
 </p:sldLayout>
 </file>
 
@@ -459,7 +501,7 @@
           <a:p>
             <a:fld id="{DA8C586C-46CD-4213-A7C8-EE86E18B4B1F}" type="datetimeFigureOut">
               <a:rPr lang="ru-RU" smtClean="0"/>
-              <a:t>05.07.2026</a:t>
+              <a:t>28.07.2026</a:t>
             </a:fld>
             <a:endParaRPr lang="ru-RU"/>
           </a:p>
@@ -529,6 +571,22 @@
   <p:clrMapOvr>
     <a:masterClrMapping/>
   </p:clrMapOvr>
+  <p:extLst>
+    <p:ext uri="{DCECCB84-F9BA-43D5-87BE-67443E8EF086}">
+      <p15:sldGuideLst xmlns:p15="http://schemas.microsoft.com/office/powerpoint/2012/main">
+        <p15:guide id="1" orient="horz" pos="2160" userDrawn="1">
+          <p15:clr>
+            <a:srgbClr val="FBAE40"/>
+          </p15:clr>
+        </p15:guide>
+        <p15:guide id="2" pos="3840" userDrawn="1">
+          <p15:clr>
+            <a:srgbClr val="FBAE40"/>
+          </p15:clr>
+        </p15:guide>
+      </p15:sldGuideLst>
+    </p:ext>
+  </p:extLst>
 </p:sldLayout>
 </file>
 
@@ -667,7 +725,7 @@
           <a:p>
             <a:fld id="{DA8C586C-46CD-4213-A7C8-EE86E18B4B1F}" type="datetimeFigureOut">
               <a:rPr lang="ru-RU" smtClean="0"/>
-              <a:t>05.07.2026</a:t>
+              <a:t>28.07.2026</a:t>
             </a:fld>
             <a:endParaRPr lang="ru-RU"/>
           </a:p>
@@ -779,7 +837,7 @@
           <a:lstStyle/>
           <a:p>
             <a:r>
-              <a:rPr lang="ru-RU"/>
+              <a:rPr lang="ru-RU" dirty="0"/>
               <a:t>Образец заголовка</a:t>
             </a:r>
           </a:p>
@@ -804,39 +862,49 @@
         <p:spPr/>
         <p:txBody>
           <a:bodyPr/>
-          <a:lstStyle/>
+          <a:lstStyle>
+            <a:lvl2pPr>
+              <a:defRPr sz="1800">
+                <a:solidFill>
+                  <a:srgbClr val="4A5568"/>
+                </a:solidFill>
+                <a:latin typeface="Inter 18pt Regular" panose="02000503000000020004" pitchFamily="2" charset="0"/>
+                <a:ea typeface="Inter 18pt Regular" panose="02000503000000020004" pitchFamily="2" charset="0"/>
+              </a:defRPr>
+            </a:lvl2pPr>
+          </a:lstStyle>
           <a:p>
             <a:pPr lvl="0"/>
             <a:r>
-              <a:rPr lang="ru-RU"/>
+              <a:rPr lang="ru-RU" dirty="0"/>
               <a:t>Образец текста</a:t>
             </a:r>
           </a:p>
           <a:p>
             <a:pPr lvl="1"/>
             <a:r>
-              <a:rPr lang="ru-RU"/>
+              <a:rPr lang="ru-RU" dirty="0"/>
               <a:t>Второй уровень</a:t>
             </a:r>
           </a:p>
           <a:p>
             <a:pPr lvl="2"/>
             <a:r>
-              <a:rPr lang="ru-RU"/>
+              <a:rPr lang="ru-RU" dirty="0"/>
               <a:t>Третий уровень</a:t>
             </a:r>
           </a:p>
           <a:p>
             <a:pPr lvl="3"/>
             <a:r>
-              <a:rPr lang="ru-RU"/>
+              <a:rPr lang="ru-RU" dirty="0"/>
               <a:t>Четвертый уровень</a:t>
             </a:r>
           </a:p>
           <a:p>
             <a:pPr lvl="4"/>
             <a:r>
-              <a:rPr lang="ru-RU"/>
+              <a:rPr lang="ru-RU" dirty="0"/>
               <a:t>Пятый уровень</a:t>
             </a:r>
           </a:p>
@@ -865,7 +933,7 @@
           <a:p>
             <a:fld id="{DA8C586C-46CD-4213-A7C8-EE86E18B4B1F}" type="datetimeFigureOut">
               <a:rPr lang="ru-RU" smtClean="0"/>
-              <a:t>05.07.2026</a:t>
+              <a:t>28.07.2026</a:t>
             </a:fld>
             <a:endParaRPr lang="ru-RU"/>
           </a:p>
@@ -1140,7 +1208,7 @@
           <a:p>
             <a:fld id="{DA8C586C-46CD-4213-A7C8-EE86E18B4B1F}" type="datetimeFigureOut">
               <a:rPr lang="ru-RU" smtClean="0"/>
-              <a:t>05.07.2026</a:t>
+              <a:t>28.07.2026</a:t>
             </a:fld>
             <a:endParaRPr lang="ru-RU"/>
           </a:p>
@@ -1405,7 +1473,7 @@
           <a:p>
             <a:fld id="{DA8C586C-46CD-4213-A7C8-EE86E18B4B1F}" type="datetimeFigureOut">
               <a:rPr lang="ru-RU" smtClean="0"/>
-              <a:t>05.07.2026</a:t>
+              <a:t>28.07.2026</a:t>
             </a:fld>
             <a:endParaRPr lang="ru-RU"/>
           </a:p>
@@ -1817,7 +1885,7 @@
           <a:p>
             <a:fld id="{DA8C586C-46CD-4213-A7C8-EE86E18B4B1F}" type="datetimeFigureOut">
               <a:rPr lang="ru-RU" smtClean="0"/>
-              <a:t>05.07.2026</a:t>
+              <a:t>28.07.2026</a:t>
             </a:fld>
             <a:endParaRPr lang="ru-RU"/>
           </a:p>
@@ -1887,6 +1955,22 @@
   <p:clrMapOvr>
     <a:masterClrMapping/>
   </p:clrMapOvr>
+  <p:extLst>
+    <p:ext uri="{DCECCB84-F9BA-43D5-87BE-67443E8EF086}">
+      <p15:sldGuideLst xmlns:p15="http://schemas.microsoft.com/office/powerpoint/2012/main">
+        <p15:guide id="1" orient="horz" pos="2160" userDrawn="1">
+          <p15:clr>
+            <a:srgbClr val="FBAE40"/>
+          </p15:clr>
+        </p15:guide>
+        <p15:guide id="2" pos="3840" userDrawn="1">
+          <p15:clr>
+            <a:srgbClr val="FBAE40"/>
+          </p15:clr>
+        </p15:guide>
+      </p15:sldGuideLst>
+    </p:ext>
+  </p:extLst>
 </p:sldLayout>
 </file>
 
@@ -1958,7 +2042,7 @@
           <a:p>
             <a:fld id="{DA8C586C-46CD-4213-A7C8-EE86E18B4B1F}" type="datetimeFigureOut">
               <a:rPr lang="ru-RU" smtClean="0"/>
-              <a:t>05.07.2026</a:t>
+              <a:t>28.07.2026</a:t>
             </a:fld>
             <a:endParaRPr lang="ru-RU"/>
           </a:p>
@@ -2028,6 +2112,22 @@
   <p:clrMapOvr>
     <a:masterClrMapping/>
   </p:clrMapOvr>
+  <p:extLst>
+    <p:ext uri="{DCECCB84-F9BA-43D5-87BE-67443E8EF086}">
+      <p15:sldGuideLst xmlns:p15="http://schemas.microsoft.com/office/powerpoint/2012/main">
+        <p15:guide id="1" orient="horz" pos="2160" userDrawn="1">
+          <p15:clr>
+            <a:srgbClr val="FBAE40"/>
+          </p15:clr>
+        </p15:guide>
+        <p15:guide id="2" pos="3840" userDrawn="1">
+          <p15:clr>
+            <a:srgbClr val="FBAE40"/>
+          </p15:clr>
+        </p15:guide>
+      </p15:sldGuideLst>
+    </p:ext>
+  </p:extLst>
 </p:sldLayout>
 </file>
 
@@ -2071,7 +2171,7 @@
           <a:p>
             <a:fld id="{DA8C586C-46CD-4213-A7C8-EE86E18B4B1F}" type="datetimeFigureOut">
               <a:rPr lang="ru-RU" smtClean="0"/>
-              <a:t>05.07.2026</a:t>
+              <a:t>28.07.2026</a:t>
             </a:fld>
             <a:endParaRPr lang="ru-RU"/>
           </a:p>
@@ -2141,6 +2241,22 @@
   <p:clrMapOvr>
     <a:masterClrMapping/>
   </p:clrMapOvr>
+  <p:extLst>
+    <p:ext uri="{DCECCB84-F9BA-43D5-87BE-67443E8EF086}">
+      <p15:sldGuideLst xmlns:p15="http://schemas.microsoft.com/office/powerpoint/2012/main">
+        <p15:guide id="1" orient="horz" pos="2160" userDrawn="1">
+          <p15:clr>
+            <a:srgbClr val="FBAE40"/>
+          </p15:clr>
+        </p15:guide>
+        <p15:guide id="2" pos="3840" userDrawn="1">
+          <p15:clr>
+            <a:srgbClr val="FBAE40"/>
+          </p15:clr>
+        </p15:guide>
+      </p15:sldGuideLst>
+    </p:ext>
+  </p:extLst>
 </p:sldLayout>
 </file>
 
@@ -2382,7 +2498,7 @@
           <a:p>
             <a:fld id="{DA8C586C-46CD-4213-A7C8-EE86E18B4B1F}" type="datetimeFigureOut">
               <a:rPr lang="ru-RU" smtClean="0"/>
-              <a:t>05.07.2026</a:t>
+              <a:t>28.07.2026</a:t>
             </a:fld>
             <a:endParaRPr lang="ru-RU"/>
           </a:p>
@@ -2452,6 +2568,22 @@
   <p:clrMapOvr>
     <a:masterClrMapping/>
   </p:clrMapOvr>
+  <p:extLst>
+    <p:ext uri="{DCECCB84-F9BA-43D5-87BE-67443E8EF086}">
+      <p15:sldGuideLst xmlns:p15="http://schemas.microsoft.com/office/powerpoint/2012/main">
+        <p15:guide id="1" orient="horz" pos="2160" userDrawn="1">
+          <p15:clr>
+            <a:srgbClr val="FBAE40"/>
+          </p15:clr>
+        </p15:guide>
+        <p15:guide id="2" pos="3840" userDrawn="1">
+          <p15:clr>
+            <a:srgbClr val="FBAE40"/>
+          </p15:clr>
+        </p15:guide>
+      </p15:sldGuideLst>
+    </p:ext>
+  </p:extLst>
 </p:sldLayout>
 </file>
 
@@ -2670,7 +2802,7 @@
           <a:p>
             <a:fld id="{DA8C586C-46CD-4213-A7C8-EE86E18B4B1F}" type="datetimeFigureOut">
               <a:rPr lang="ru-RU" smtClean="0"/>
-              <a:t>05.07.2026</a:t>
+              <a:t>28.07.2026</a:t>
             </a:fld>
             <a:endParaRPr lang="ru-RU"/>
           </a:p>
@@ -2740,6 +2872,22 @@
   <p:clrMapOvr>
     <a:masterClrMapping/>
   </p:clrMapOvr>
+  <p:extLst>
+    <p:ext uri="{DCECCB84-F9BA-43D5-87BE-67443E8EF086}">
+      <p15:sldGuideLst xmlns:p15="http://schemas.microsoft.com/office/powerpoint/2012/main">
+        <p15:guide id="1" orient="horz" pos="2160" userDrawn="1">
+          <p15:clr>
+            <a:srgbClr val="FBAE40"/>
+          </p15:clr>
+        </p15:guide>
+        <p15:guide id="2" pos="3840" userDrawn="1">
+          <p15:clr>
+            <a:srgbClr val="FBAE40"/>
+          </p15:clr>
+        </p15:guide>
+      </p15:sldGuideLst>
+    </p:ext>
+  </p:extLst>
 </p:sldLayout>
 </file>
 
@@ -2747,9 +2895,12 @@
 <p:sldMaster xmlns:a="http://schemas.openxmlformats.org/drawingml/2006/main" xmlns:r="http://schemas.openxmlformats.org/officeDocument/2006/relationships" xmlns:p="http://schemas.openxmlformats.org/presentationml/2006/main">
   <p:cSld>
     <p:bg>
-      <p:bgRef idx="1001">
-        <a:schemeClr val="bg1"/>
-      </p:bgRef>
+      <p:bgPr>
+        <a:solidFill>
+          <a:srgbClr val="FFFFFF"/>
+        </a:solidFill>
+        <a:effectLst/>
+      </p:bgPr>
     </p:bg>
     <p:spTree>
       <p:nvGrpSpPr>
@@ -2797,7 +2948,7 @@
           <a:lstStyle/>
           <a:p>
             <a:r>
-              <a:rPr lang="ru-RU"/>
+              <a:rPr lang="ru-RU" dirty="0"/>
               <a:t>Образец заголовка</a:t>
             </a:r>
           </a:p>
@@ -2836,35 +2987,35 @@
           <a:p>
             <a:pPr lvl="0"/>
             <a:r>
-              <a:rPr lang="ru-RU"/>
+              <a:rPr lang="ru-RU" dirty="0"/>
               <a:t>Образец текста</a:t>
             </a:r>
           </a:p>
           <a:p>
             <a:pPr lvl="1"/>
             <a:r>
-              <a:rPr lang="ru-RU"/>
+              <a:rPr lang="ru-RU" dirty="0"/>
               <a:t>Второй уровень</a:t>
             </a:r>
           </a:p>
           <a:p>
             <a:pPr lvl="2"/>
             <a:r>
-              <a:rPr lang="ru-RU"/>
+              <a:rPr lang="ru-RU" dirty="0"/>
               <a:t>Третий уровень</a:t>
             </a:r>
           </a:p>
           <a:p>
             <a:pPr lvl="3"/>
             <a:r>
-              <a:rPr lang="ru-RU"/>
+              <a:rPr lang="ru-RU" dirty="0"/>
               <a:t>Четвертый уровень</a:t>
             </a:r>
           </a:p>
           <a:p>
             <a:pPr lvl="4"/>
             <a:r>
-              <a:rPr lang="ru-RU"/>
+              <a:rPr lang="ru-RU" dirty="0"/>
               <a:t>Пятый уровень</a:t>
             </a:r>
           </a:p>
@@ -2911,7 +3062,7 @@
           <a:p>
             <a:fld id="{DA8C586C-46CD-4213-A7C8-EE86E18B4B1F}" type="datetimeFigureOut">
               <a:rPr lang="ru-RU" smtClean="0"/>
-              <a:t>05.07.2026</a:t>
+              <a:t>28.07.2026</a:t>
             </a:fld>
             <a:endParaRPr lang="ru-RU"/>
           </a:p>
@@ -3038,11 +3189,12 @@
           <a:spcPct val="0"/>
         </a:spcBef>
         <a:buNone/>
-        <a:defRPr sz="4400" kern="1200">
+        <a:defRPr sz="4000" kern="1200">
           <a:solidFill>
-            <a:schemeClr val="tx1"/>
+            <a:srgbClr val="2D3748"/>
           </a:solidFill>
-          <a:latin typeface="+mj-lt"/>
+          <a:effectLst/>
+          <a:latin typeface="Montserrat SemiBold" panose="020F0502020204030204" pitchFamily="2" charset="-52"/>
           <a:ea typeface="+mj-ea"/>
           <a:cs typeface="+mj-cs"/>
         </a:defRPr>
@@ -3058,12 +3210,12 @@
         </a:spcBef>
         <a:buFont typeface="Arial" panose="020B0604020202020204" pitchFamily="34" charset="0"/>
         <a:buChar char="•"/>
-        <a:defRPr sz="2800" kern="1200">
+        <a:defRPr sz="2400" kern="1200">
           <a:solidFill>
-            <a:schemeClr val="tx1"/>
+            <a:srgbClr val="4A5568"/>
           </a:solidFill>
-          <a:latin typeface="+mn-lt"/>
-          <a:ea typeface="+mn-ea"/>
+          <a:latin typeface="Inter 24pt Regular" panose="02000503000000020004" pitchFamily="2" charset="0"/>
+          <a:ea typeface="Inter 24pt Regular" panose="02000503000000020004" pitchFamily="2" charset="0"/>
           <a:cs typeface="+mn-cs"/>
         </a:defRPr>
       </a:lvl1pPr>
@@ -3308,12 +3460,49 @@
       </a:lvl9pPr>
     </p:otherStyle>
   </p:txStyles>
+  <p:extLst>
+    <p:ext uri="{27BBF7A9-308A-43DC-89C8-2F10F3537804}">
+      <p15:sldGuideLst xmlns:p15="http://schemas.microsoft.com/office/powerpoint/2012/main">
+        <p15:guide id="1" orient="horz" pos="2160" userDrawn="1">
+          <p15:clr>
+            <a:srgbClr val="F26B43"/>
+          </p15:clr>
+        </p15:guide>
+        <p15:guide id="2" pos="3840" userDrawn="1">
+          <p15:clr>
+            <a:srgbClr val="F26B43"/>
+          </p15:clr>
+        </p15:guide>
+      </p15:sldGuideLst>
+    </p:ext>
+  </p:extLst>
 </p:sldMaster>
 </file>
 
 <file path=ppt/slides/slide1.xml><?xml version="1.0" encoding="utf-8"?>
 <p:sld xmlns:a="http://schemas.openxmlformats.org/drawingml/2006/main" xmlns:r="http://schemas.openxmlformats.org/officeDocument/2006/relationships" xmlns:p="http://schemas.openxmlformats.org/presentationml/2006/main">
   <p:cSld>
+    <p:bg>
+      <p:bgPr>
+        <a:gradFill>
+          <a:gsLst>
+            <a:gs pos="100000">
+              <a:srgbClr val="F7FAFC">
+                <a:alpha val="0"/>
+              </a:srgbClr>
+            </a:gs>
+            <a:gs pos="0">
+              <a:schemeClr val="accent1">
+                <a:lumMod val="5000"/>
+                <a:lumOff val="95000"/>
+              </a:schemeClr>
+            </a:gs>
+          </a:gsLst>
+          <a:lin ang="5400000" scaled="1"/>
+        </a:gradFill>
+        <a:effectLst/>
+      </p:bgPr>
+    </p:bg>
     <p:spTree>
       <p:nvGrpSpPr>
         <p:cNvPr id="1" name=""/>
@@ -3346,33 +3535,30 @@
         </p:nvSpPr>
         <p:spPr>
           <a:xfrm>
-            <a:off x="360218" y="540472"/>
-            <a:ext cx="11610109" cy="2387600"/>
+            <a:off x="312844" y="1314762"/>
+            <a:ext cx="11566311" cy="1397000"/>
           </a:xfrm>
         </p:spPr>
         <p:txBody>
           <a:bodyPr>
-            <a:normAutofit/>
+            <a:noAutofit/>
           </a:bodyPr>
           <a:lstStyle/>
           <a:p>
             <a:r>
-              <a:rPr lang="ru-RU" dirty="0">
-                <a:latin typeface="Times New Roman" panose="02020603050405020304" pitchFamily="18" charset="0"/>
+              <a:rPr lang="ru-RU" sz="4800" dirty="0">
                 <a:cs typeface="Times New Roman" panose="02020603050405020304" pitchFamily="18" charset="0"/>
               </a:rPr>
               <a:t>Разработка веб-ориентированной </a:t>
             </a:r>
             <a:r>
-              <a:rPr lang="en-US" dirty="0">
-                <a:latin typeface="Times New Roman" panose="02020603050405020304" pitchFamily="18" charset="0"/>
+              <a:rPr lang="en-US" sz="4800" dirty="0">
                 <a:cs typeface="Times New Roman" panose="02020603050405020304" pitchFamily="18" charset="0"/>
               </a:rPr>
               <a:t>CRM-</a:t>
             </a:r>
             <a:r>
-              <a:rPr lang="ru-RU" dirty="0">
-                <a:latin typeface="Times New Roman" panose="02020603050405020304" pitchFamily="18" charset="0"/>
+              <a:rPr lang="ru-RU" sz="4800" dirty="0">
                 <a:cs typeface="Times New Roman" panose="02020603050405020304" pitchFamily="18" charset="0"/>
               </a:rPr>
               <a:t>системы</a:t>
@@ -3398,48 +3584,43 @@
         </p:nvSpPr>
         <p:spPr>
           <a:xfrm>
-            <a:off x="9282545" y="5461000"/>
-            <a:ext cx="2909455" cy="1397000"/>
+            <a:off x="6095999" y="5643717"/>
+            <a:ext cx="6096000" cy="663677"/>
           </a:xfrm>
         </p:spPr>
         <p:txBody>
           <a:bodyPr>
-            <a:normAutofit lnSpcReduction="10000"/>
+            <a:noAutofit/>
           </a:bodyPr>
           <a:lstStyle/>
           <a:p>
             <a:pPr algn="l"/>
             <a:r>
               <a:rPr lang="ru-RU" dirty="0">
-                <a:latin typeface="Times New Roman" panose="02020603050405020304" pitchFamily="18" charset="0"/>
                 <a:cs typeface="Times New Roman" panose="02020603050405020304" pitchFamily="18" charset="0"/>
               </a:rPr>
               <a:t>Выполнил</a:t>
             </a:r>
             <a:r>
               <a:rPr lang="en-US" dirty="0">
-                <a:latin typeface="Times New Roman" panose="02020603050405020304" pitchFamily="18" charset="0"/>
                 <a:cs typeface="Times New Roman" panose="02020603050405020304" pitchFamily="18" charset="0"/>
               </a:rPr>
               <a:t>:</a:t>
             </a:r>
             <a:r>
               <a:rPr lang="ru-RU" dirty="0">
-                <a:latin typeface="Times New Roman" panose="02020603050405020304" pitchFamily="18" charset="0"/>
                 <a:cs typeface="Times New Roman" panose="02020603050405020304" pitchFamily="18" charset="0"/>
               </a:rPr>
               <a:t> Сахарчук Даниил Игоревич Группа</a:t>
             </a:r>
             <a:r>
               <a:rPr lang="en-US" dirty="0">
-                <a:latin typeface="Times New Roman" panose="02020603050405020304" pitchFamily="18" charset="0"/>
                 <a:cs typeface="Times New Roman" panose="02020603050405020304" pitchFamily="18" charset="0"/>
               </a:rPr>
               <a:t>: </a:t>
             </a:r>
             <a:r>
               <a:rPr lang="ru-RU" dirty="0">
-                <a:latin typeface="Times New Roman" panose="02020603050405020304" pitchFamily="18" charset="0"/>
                 <a:cs typeface="Times New Roman" panose="02020603050405020304" pitchFamily="18" charset="0"/>
               </a:rPr>
               <a:t>П29</a:t>
@@ -3493,14 +3674,18 @@
             <p:ph type="title"/>
           </p:nvPr>
         </p:nvSpPr>
-        <p:spPr/>
+        <p:spPr>
+          <a:xfrm>
+            <a:off x="387928" y="548640"/>
+            <a:ext cx="6442640" cy="713232"/>
+          </a:xfrm>
+        </p:spPr>
         <p:txBody>
           <a:bodyPr/>
           <a:lstStyle/>
           <a:p>
             <a:r>
               <a:rPr lang="ru-RU" dirty="0">
-                <a:latin typeface="Times New Roman" panose="02020603050405020304" pitchFamily="18" charset="0"/>
                 <a:cs typeface="Times New Roman" panose="02020603050405020304" pitchFamily="18" charset="0"/>
               </a:rPr>
               <a:t>Актуальность и Цели</a:t>
@@ -3526,8 +3711,8 @@
         </p:nvSpPr>
         <p:spPr>
           <a:xfrm>
-            <a:off x="193963" y="1574800"/>
-            <a:ext cx="11610109" cy="5283200"/>
+            <a:off x="387928" y="2022856"/>
+            <a:ext cx="11385943" cy="5283200"/>
           </a:xfrm>
         </p:spPr>
         <p:txBody>
@@ -3536,89 +3721,85 @@
           </a:bodyPr>
           <a:lstStyle/>
           <a:p>
+            <a:pPr marL="0" indent="0">
+              <a:buNone/>
+            </a:pPr>
             <a:r>
               <a:rPr lang="ru-RU" b="1" dirty="0">
-                <a:latin typeface="Times New Roman" panose="02020603050405020304" pitchFamily="18" charset="0"/>
                 <a:cs typeface="Times New Roman" panose="02020603050405020304" pitchFamily="18" charset="0"/>
               </a:rPr>
               <a:t>Проблема:</a:t>
             </a:r>
             <a:r>
               <a:rPr lang="ru-RU" dirty="0">
-                <a:latin typeface="Times New Roman" panose="02020603050405020304" pitchFamily="18" charset="0"/>
                 <a:cs typeface="Times New Roman" panose="02020603050405020304" pitchFamily="18" charset="0"/>
               </a:rPr>
               <a:t> Перегруженность менеджеров рутиной, потеря истории взаимодействий с клиентами, сложность контроля воронки.</a:t>
             </a:r>
           </a:p>
           <a:p>
+            <a:pPr marL="0" indent="0">
+              <a:buNone/>
+            </a:pPr>
             <a:r>
               <a:rPr lang="ru-RU" b="1" dirty="0">
-                <a:latin typeface="Times New Roman" panose="02020603050405020304" pitchFamily="18" charset="0"/>
                 <a:cs typeface="Times New Roman" panose="02020603050405020304" pitchFamily="18" charset="0"/>
               </a:rPr>
               <a:t>Цель проекта:</a:t>
             </a:r>
             <a:r>
               <a:rPr lang="ru-RU" dirty="0">
-                <a:latin typeface="Times New Roman" panose="02020603050405020304" pitchFamily="18" charset="0"/>
                 <a:cs typeface="Times New Roman" panose="02020603050405020304" pitchFamily="18" charset="0"/>
               </a:rPr>
               <a:t> Создание легковесной, отзывчивой CRM-системы для управления сделками и прозрачного логирования активности менеджеров.</a:t>
             </a:r>
           </a:p>
           <a:p>
+            <a:pPr marL="0" indent="0">
+              <a:buNone/>
+            </a:pPr>
             <a:r>
               <a:rPr lang="ru-RU" b="1" dirty="0">
-                <a:latin typeface="Times New Roman" panose="02020603050405020304" pitchFamily="18" charset="0"/>
                 <a:cs typeface="Times New Roman" panose="02020603050405020304" pitchFamily="18" charset="0"/>
               </a:rPr>
               <a:t>Задачи:</a:t>
             </a:r>
             <a:r>
               <a:rPr lang="ru-RU" dirty="0">
-                <a:latin typeface="Times New Roman" panose="02020603050405020304" pitchFamily="18" charset="0"/>
                 <a:cs typeface="Times New Roman" panose="02020603050405020304" pitchFamily="18" charset="0"/>
               </a:rPr>
-              <a:t> Проектирование реляционной базы данных.</a:t>
-            </a:r>
-          </a:p>
-          <a:p>
-            <a:pPr lvl="1"/>
-            <a:r>
-              <a:rPr lang="ru-RU" sz="2800" dirty="0">
-                <a:latin typeface="Times New Roman" panose="02020603050405020304" pitchFamily="18" charset="0"/>
+              <a:t> </a:t>
+            </a:r>
+          </a:p>
+          <a:p>
+            <a:r>
+              <a:rPr lang="ru-RU" dirty="0">
                 <a:cs typeface="Times New Roman" panose="02020603050405020304" pitchFamily="18" charset="0"/>
               </a:rPr>
-              <a:t>Реализация интерактивной </a:t>
-            </a:r>
-            <a:r>
-              <a:rPr lang="ru-RU" sz="2800" dirty="0" err="1">
-                <a:latin typeface="Times New Roman" panose="02020603050405020304" pitchFamily="18" charset="0"/>
+              <a:t>Проектирование реляционной базы данных.</a:t>
+            </a:r>
+            <a:endParaRPr lang="en-US" dirty="0">
+              <a:cs typeface="Times New Roman" panose="02020603050405020304" pitchFamily="18" charset="0"/>
+            </a:endParaRPr>
+          </a:p>
+          <a:p>
+            <a:r>
+              <a:rPr lang="ru-RU" dirty="0">
                 <a:cs typeface="Times New Roman" panose="02020603050405020304" pitchFamily="18" charset="0"/>
               </a:rPr>
-              <a:t>Канбан</a:t>
-            </a:r>
-            <a:r>
-              <a:rPr lang="ru-RU" sz="2800" dirty="0">
-                <a:latin typeface="Times New Roman" panose="02020603050405020304" pitchFamily="18" charset="0"/>
-                <a:cs typeface="Times New Roman" panose="02020603050405020304" pitchFamily="18" charset="0"/>
-              </a:rPr>
-              <a:t>-доски с AJAX-синхронизацией.</a:t>
-            </a:r>
-          </a:p>
-          <a:p>
-            <a:pPr lvl="1"/>
-            <a:r>
-              <a:rPr lang="ru-RU" sz="2800" dirty="0">
-                <a:latin typeface="Times New Roman" panose="02020603050405020304" pitchFamily="18" charset="0"/>
+              <a:t>Реализация интерактивной Канбан-доски с AJAX-синхронизацией.</a:t>
+            </a:r>
+            <a:endParaRPr lang="en-US" dirty="0">
+              <a:cs typeface="Times New Roman" panose="02020603050405020304" pitchFamily="18" charset="0"/>
+            </a:endParaRPr>
+          </a:p>
+          <a:p>
+            <a:r>
+              <a:rPr lang="ru-RU" dirty="0">
                 <a:cs typeface="Times New Roman" panose="02020603050405020304" pitchFamily="18" charset="0"/>
               </a:rPr>
               <a:t>Внедрение сквозной подсистемы безопасности и ролевого доступа.</a:t>
             </a:r>
-          </a:p>
-          <a:p>
-            <a:endParaRPr lang="ru-RU" dirty="0"/>
           </a:p>
         </p:txBody>
       </p:sp>
@@ -3668,14 +3849,18 @@
             <p:ph type="title"/>
           </p:nvPr>
         </p:nvSpPr>
-        <p:spPr/>
+        <p:spPr>
+          <a:xfrm>
+            <a:off x="353568" y="566293"/>
+            <a:ext cx="9796272" cy="677291"/>
+          </a:xfrm>
+        </p:spPr>
         <p:txBody>
           <a:bodyPr/>
           <a:lstStyle/>
           <a:p>
             <a:r>
               <a:rPr lang="ru-RU" dirty="0">
-                <a:latin typeface="Times New Roman" panose="02020603050405020304" pitchFamily="18" charset="0"/>
                 <a:cs typeface="Times New Roman" panose="02020603050405020304" pitchFamily="18" charset="0"/>
               </a:rPr>
               <a:t>Технологический стек</a:t>
@@ -3762,8 +3947,7 @@
               </a:spcAft>
               <a:buClrTx/>
               <a:buSzTx/>
-              <a:buFontTx/>
-              <a:buChar char="•"/>
+              <a:buNone/>
               <a:tabLst/>
             </a:pPr>
             <a:r>
@@ -3771,11 +3955,7 @@
                 <a:ln>
                   <a:noFill/>
                 </a:ln>
-                <a:solidFill>
-                  <a:schemeClr val="tx1"/>
-                </a:solidFill>
                 <a:effectLst/>
-                <a:latin typeface="Times New Roman" panose="02020603050405020304" pitchFamily="18" charset="0"/>
                 <a:cs typeface="Times New Roman" panose="02020603050405020304" pitchFamily="18" charset="0"/>
               </a:rPr>
               <a:t>Бэкенд:</a:t>
@@ -3785,11 +3965,7 @@
                 <a:ln>
                   <a:noFill/>
                 </a:ln>
-                <a:solidFill>
-                  <a:schemeClr val="tx1"/>
-                </a:solidFill>
                 <a:effectLst/>
-                <a:latin typeface="Times New Roman" panose="02020603050405020304" pitchFamily="18" charset="0"/>
                 <a:cs typeface="Times New Roman" panose="02020603050405020304" pitchFamily="18" charset="0"/>
               </a:rPr>
               <a:t> .NET 10 (ASP.NET </a:t>
@@ -3799,11 +3975,7 @@
                 <a:ln>
                   <a:noFill/>
                 </a:ln>
-                <a:solidFill>
-                  <a:schemeClr val="tx1"/>
-                </a:solidFill>
                 <a:effectLst/>
-                <a:latin typeface="Times New Roman" panose="02020603050405020304" pitchFamily="18" charset="0"/>
                 <a:cs typeface="Times New Roman" panose="02020603050405020304" pitchFamily="18" charset="0"/>
               </a:rPr>
               <a:t>Core</a:t>
@@ -3813,11 +3985,7 @@
                 <a:ln>
                   <a:noFill/>
                 </a:ln>
-                <a:solidFill>
-                  <a:schemeClr val="tx1"/>
-                </a:solidFill>
                 <a:effectLst/>
-                <a:latin typeface="Times New Roman" panose="02020603050405020304" pitchFamily="18" charset="0"/>
                 <a:cs typeface="Times New Roman" panose="02020603050405020304" pitchFamily="18" charset="0"/>
               </a:rPr>
               <a:t> MVC), </a:t>
@@ -3827,11 +3995,7 @@
                 <a:ln>
                   <a:noFill/>
                 </a:ln>
-                <a:solidFill>
-                  <a:schemeClr val="tx1"/>
-                </a:solidFill>
                 <a:effectLst/>
-                <a:latin typeface="Times New Roman" panose="02020603050405020304" pitchFamily="18" charset="0"/>
                 <a:cs typeface="Times New Roman" panose="02020603050405020304" pitchFamily="18" charset="0"/>
               </a:rPr>
               <a:t>Entity</a:t>
@@ -3841,11 +4005,7 @@
                 <a:ln>
                   <a:noFill/>
                 </a:ln>
-                <a:solidFill>
-                  <a:schemeClr val="tx1"/>
-                </a:solidFill>
                 <a:effectLst/>
-                <a:latin typeface="Times New Roman" panose="02020603050405020304" pitchFamily="18" charset="0"/>
                 <a:cs typeface="Times New Roman" panose="02020603050405020304" pitchFamily="18" charset="0"/>
               </a:rPr>
               <a:t> </a:t>
@@ -3855,11 +4015,7 @@
                 <a:ln>
                   <a:noFill/>
                 </a:ln>
-                <a:solidFill>
-                  <a:schemeClr val="tx1"/>
-                </a:solidFill>
                 <a:effectLst/>
-                <a:latin typeface="Times New Roman" panose="02020603050405020304" pitchFamily="18" charset="0"/>
                 <a:cs typeface="Times New Roman" panose="02020603050405020304" pitchFamily="18" charset="0"/>
               </a:rPr>
               <a:t>Framework</a:t>
@@ -3869,11 +4025,7 @@
                 <a:ln>
                   <a:noFill/>
                 </a:ln>
-                <a:solidFill>
-                  <a:schemeClr val="tx1"/>
-                </a:solidFill>
                 <a:effectLst/>
-                <a:latin typeface="Times New Roman" panose="02020603050405020304" pitchFamily="18" charset="0"/>
                 <a:cs typeface="Times New Roman" panose="02020603050405020304" pitchFamily="18" charset="0"/>
               </a:rPr>
               <a:t> </a:t>
@@ -3883,11 +4035,7 @@
                 <a:ln>
                   <a:noFill/>
                 </a:ln>
-                <a:solidFill>
-                  <a:schemeClr val="tx1"/>
-                </a:solidFill>
                 <a:effectLst/>
-                <a:latin typeface="Times New Roman" panose="02020603050405020304" pitchFamily="18" charset="0"/>
                 <a:cs typeface="Times New Roman" panose="02020603050405020304" pitchFamily="18" charset="0"/>
               </a:rPr>
               <a:t>Core</a:t>
@@ -3897,11 +4045,7 @@
                 <a:ln>
                   <a:noFill/>
                 </a:ln>
-                <a:solidFill>
-                  <a:schemeClr val="tx1"/>
-                </a:solidFill>
                 <a:effectLst/>
-                <a:latin typeface="Times New Roman" panose="02020603050405020304" pitchFamily="18" charset="0"/>
                 <a:cs typeface="Times New Roman" panose="02020603050405020304" pitchFamily="18" charset="0"/>
               </a:rPr>
               <a:t> 10</a:t>
@@ -3920,8 +4064,7 @@
               </a:spcAft>
               <a:buClrTx/>
               <a:buSzTx/>
-              <a:buFontTx/>
-              <a:buChar char="•"/>
+              <a:buNone/>
               <a:tabLst/>
             </a:pPr>
             <a:r>
@@ -3929,11 +4072,7 @@
                 <a:ln>
                   <a:noFill/>
                 </a:ln>
-                <a:solidFill>
-                  <a:schemeClr val="tx1"/>
-                </a:solidFill>
                 <a:effectLst/>
-                <a:latin typeface="Times New Roman" panose="02020603050405020304" pitchFamily="18" charset="0"/>
                 <a:cs typeface="Times New Roman" panose="02020603050405020304" pitchFamily="18" charset="0"/>
               </a:rPr>
               <a:t>База данных:</a:t>
@@ -3943,11 +4082,7 @@
                 <a:ln>
                   <a:noFill/>
                 </a:ln>
-                <a:solidFill>
-                  <a:schemeClr val="tx1"/>
-                </a:solidFill>
                 <a:effectLst/>
-                <a:latin typeface="Times New Roman" panose="02020603050405020304" pitchFamily="18" charset="0"/>
                 <a:cs typeface="Times New Roman" panose="02020603050405020304" pitchFamily="18" charset="0"/>
               </a:rPr>
               <a:t> </a:t>
@@ -3957,11 +4092,7 @@
                 <a:ln>
                   <a:noFill/>
                 </a:ln>
-                <a:solidFill>
-                  <a:schemeClr val="tx1"/>
-                </a:solidFill>
                 <a:effectLst/>
-                <a:latin typeface="Times New Roman" panose="02020603050405020304" pitchFamily="18" charset="0"/>
                 <a:cs typeface="Times New Roman" panose="02020603050405020304" pitchFamily="18" charset="0"/>
               </a:rPr>
               <a:t>PostgreSQL</a:t>
@@ -3970,11 +4101,7 @@
               <a:ln>
                 <a:noFill/>
               </a:ln>
-              <a:solidFill>
-                <a:schemeClr val="tx1"/>
-              </a:solidFill>
               <a:effectLst/>
-              <a:latin typeface="Times New Roman" panose="02020603050405020304" pitchFamily="18" charset="0"/>
               <a:cs typeface="Times New Roman" panose="02020603050405020304" pitchFamily="18" charset="0"/>
             </a:endParaRPr>
           </a:p>
@@ -3991,8 +4118,7 @@
               </a:spcAft>
               <a:buClrTx/>
               <a:buSzTx/>
-              <a:buFontTx/>
-              <a:buChar char="•"/>
+              <a:buNone/>
               <a:tabLst/>
             </a:pPr>
             <a:r>
@@ -4000,11 +4126,7 @@
                 <a:ln>
                   <a:noFill/>
                 </a:ln>
-                <a:solidFill>
-                  <a:schemeClr val="tx1"/>
-                </a:solidFill>
                 <a:effectLst/>
-                <a:latin typeface="Times New Roman" panose="02020603050405020304" pitchFamily="18" charset="0"/>
                 <a:cs typeface="Times New Roman" panose="02020603050405020304" pitchFamily="18" charset="0"/>
               </a:rPr>
               <a:t>Фронтенд</a:t>
@@ -4014,11 +4136,7 @@
                 <a:ln>
                   <a:noFill/>
                 </a:ln>
-                <a:solidFill>
-                  <a:schemeClr val="tx1"/>
-                </a:solidFill>
                 <a:effectLst/>
-                <a:latin typeface="Times New Roman" panose="02020603050405020304" pitchFamily="18" charset="0"/>
                 <a:cs typeface="Times New Roman" panose="02020603050405020304" pitchFamily="18" charset="0"/>
               </a:rPr>
               <a:t>:</a:t>
@@ -4028,11 +4146,7 @@
                 <a:ln>
                   <a:noFill/>
                 </a:ln>
-                <a:solidFill>
-                  <a:schemeClr val="tx1"/>
-                </a:solidFill>
                 <a:effectLst/>
-                <a:latin typeface="Times New Roman" panose="02020603050405020304" pitchFamily="18" charset="0"/>
                 <a:cs typeface="Times New Roman" panose="02020603050405020304" pitchFamily="18" charset="0"/>
               </a:rPr>
               <a:t> </a:t>
@@ -4042,11 +4156,7 @@
                 <a:ln>
                   <a:noFill/>
                 </a:ln>
-                <a:solidFill>
-                  <a:schemeClr val="tx1"/>
-                </a:solidFill>
                 <a:effectLst/>
-                <a:latin typeface="Times New Roman" panose="02020603050405020304" pitchFamily="18" charset="0"/>
                 <a:cs typeface="Times New Roman" panose="02020603050405020304" pitchFamily="18" charset="0"/>
               </a:rPr>
               <a:t>Razor</a:t>
@@ -4056,11 +4166,7 @@
                 <a:ln>
                   <a:noFill/>
                 </a:ln>
-                <a:solidFill>
-                  <a:schemeClr val="tx1"/>
-                </a:solidFill>
                 <a:effectLst/>
-                <a:latin typeface="Times New Roman" panose="02020603050405020304" pitchFamily="18" charset="0"/>
                 <a:cs typeface="Times New Roman" panose="02020603050405020304" pitchFamily="18" charset="0"/>
               </a:rPr>
               <a:t> </a:t>
@@ -4070,11 +4176,7 @@
                 <a:ln>
                   <a:noFill/>
                 </a:ln>
-                <a:solidFill>
-                  <a:schemeClr val="tx1"/>
-                </a:solidFill>
                 <a:effectLst/>
-                <a:latin typeface="Times New Roman" panose="02020603050405020304" pitchFamily="18" charset="0"/>
                 <a:cs typeface="Times New Roman" panose="02020603050405020304" pitchFamily="18" charset="0"/>
               </a:rPr>
               <a:t>Views</a:t>
@@ -4084,11 +4186,7 @@
                 <a:ln>
                   <a:noFill/>
                 </a:ln>
-                <a:solidFill>
-                  <a:schemeClr val="tx1"/>
-                </a:solidFill>
                 <a:effectLst/>
-                <a:latin typeface="Times New Roman" panose="02020603050405020304" pitchFamily="18" charset="0"/>
                 <a:cs typeface="Times New Roman" panose="02020603050405020304" pitchFamily="18" charset="0"/>
               </a:rPr>
               <a:t>, </a:t>
@@ -4098,11 +4196,7 @@
                 <a:ln>
                   <a:noFill/>
                 </a:ln>
-                <a:solidFill>
-                  <a:schemeClr val="tx1"/>
-                </a:solidFill>
                 <a:effectLst/>
-                <a:latin typeface="Times New Roman" panose="02020603050405020304" pitchFamily="18" charset="0"/>
                 <a:cs typeface="Times New Roman" panose="02020603050405020304" pitchFamily="18" charset="0"/>
               </a:rPr>
               <a:t>Bootstrap</a:t>
@@ -4112,11 +4206,7 @@
                 <a:ln>
                   <a:noFill/>
                 </a:ln>
-                <a:solidFill>
-                  <a:schemeClr val="tx1"/>
-                </a:solidFill>
                 <a:effectLst/>
-                <a:latin typeface="Times New Roman" panose="02020603050405020304" pitchFamily="18" charset="0"/>
                 <a:cs typeface="Times New Roman" panose="02020603050405020304" pitchFamily="18" charset="0"/>
               </a:rPr>
               <a:t> 5, </a:t>
@@ -4126,11 +4216,7 @@
                 <a:ln>
                   <a:noFill/>
                 </a:ln>
-                <a:solidFill>
-                  <a:schemeClr val="tx1"/>
-                </a:solidFill>
                 <a:effectLst/>
-                <a:latin typeface="Times New Roman" panose="02020603050405020304" pitchFamily="18" charset="0"/>
                 <a:cs typeface="Times New Roman" panose="02020603050405020304" pitchFamily="18" charset="0"/>
               </a:rPr>
               <a:t>htmx</a:t>
@@ -4140,11 +4226,7 @@
                 <a:ln>
                   <a:noFill/>
                 </a:ln>
-                <a:solidFill>
-                  <a:schemeClr val="tx1"/>
-                </a:solidFill>
                 <a:effectLst/>
-                <a:latin typeface="Times New Roman" panose="02020603050405020304" pitchFamily="18" charset="0"/>
                 <a:cs typeface="Times New Roman" panose="02020603050405020304" pitchFamily="18" charset="0"/>
               </a:rPr>
               <a:t>, </a:t>
@@ -4154,11 +4236,7 @@
                 <a:ln>
                   <a:noFill/>
                 </a:ln>
-                <a:solidFill>
-                  <a:schemeClr val="tx1"/>
-                </a:solidFill>
                 <a:effectLst/>
-                <a:latin typeface="Times New Roman" panose="02020603050405020304" pitchFamily="18" charset="0"/>
                 <a:cs typeface="Times New Roman" panose="02020603050405020304" pitchFamily="18" charset="0"/>
               </a:rPr>
               <a:t>jQuery</a:t>
@@ -4168,11 +4246,7 @@
                 <a:ln>
                   <a:noFill/>
                 </a:ln>
-                <a:solidFill>
-                  <a:schemeClr val="tx1"/>
-                </a:solidFill>
                 <a:effectLst/>
-                <a:latin typeface="Times New Roman" panose="02020603050405020304" pitchFamily="18" charset="0"/>
                 <a:cs typeface="Times New Roman" panose="02020603050405020304" pitchFamily="18" charset="0"/>
               </a:rPr>
               <a:t>, Sortable.js, Chart.js</a:t>
@@ -4191,8 +4265,7 @@
               </a:spcAft>
               <a:buClrTx/>
               <a:buSzTx/>
-              <a:buFontTx/>
-              <a:buChar char="•"/>
+              <a:buNone/>
               <a:tabLst/>
             </a:pPr>
             <a:r>
@@ -4200,11 +4273,7 @@
                 <a:ln>
                   <a:noFill/>
                 </a:ln>
-                <a:solidFill>
-                  <a:schemeClr val="tx1"/>
-                </a:solidFill>
                 <a:effectLst/>
-                <a:latin typeface="Times New Roman" panose="02020603050405020304" pitchFamily="18" charset="0"/>
                 <a:cs typeface="Times New Roman" panose="02020603050405020304" pitchFamily="18" charset="0"/>
               </a:rPr>
               <a:t>Архитектурный подход:</a:t>
@@ -4214,67 +4283,27 @@
                 <a:ln>
                   <a:noFill/>
                 </a:ln>
-                <a:solidFill>
-                  <a:schemeClr val="tx1"/>
-                </a:solidFill>
                 <a:effectLst/>
-                <a:latin typeface="Times New Roman" panose="02020603050405020304" pitchFamily="18" charset="0"/>
                 <a:cs typeface="Times New Roman" panose="02020603050405020304" pitchFamily="18" charset="0"/>
               </a:rPr>
-              <a:t> Гибридный (</a:t>
+              <a:t> Гибридный (Server-Side </a:t>
             </a:r>
             <a:r>
               <a:rPr kumimoji="0" lang="ru-RU" altLang="ru-RU" sz="2400" b="0" i="0" u="none" strike="noStrike" cap="none" normalizeH="0" baseline="0" dirty="0" err="1">
                 <a:ln>
                   <a:noFill/>
                 </a:ln>
-                <a:solidFill>
-                  <a:schemeClr val="tx1"/>
-                </a:solidFill>
                 <a:effectLst/>
-                <a:latin typeface="Times New Roman" panose="02020603050405020304" pitchFamily="18" charset="0"/>
                 <a:cs typeface="Times New Roman" panose="02020603050405020304" pitchFamily="18" charset="0"/>
               </a:rPr>
-              <a:t>Server-Side</a:t>
+              <a:t>Rendering</a:t>
             </a:r>
             <a:r>
               <a:rPr kumimoji="0" lang="ru-RU" altLang="ru-RU" sz="2400" b="0" i="0" u="none" strike="noStrike" cap="none" normalizeH="0" baseline="0" dirty="0">
                 <a:ln>
                   <a:noFill/>
                 </a:ln>
-                <a:solidFill>
-                  <a:schemeClr val="tx1"/>
-                </a:solidFill>
                 <a:effectLst/>
-                <a:latin typeface="Times New Roman" panose="02020603050405020304" pitchFamily="18" charset="0"/>
-                <a:cs typeface="Times New Roman" panose="02020603050405020304" pitchFamily="18" charset="0"/>
-              </a:rPr>
-              <a:t> </a:t>
-            </a:r>
-            <a:r>
-              <a:rPr kumimoji="0" lang="ru-RU" altLang="ru-RU" sz="2400" b="0" i="0" u="none" strike="noStrike" cap="none" normalizeH="0" baseline="0" dirty="0" err="1">
-                <a:ln>
-                  <a:noFill/>
-                </a:ln>
-                <a:solidFill>
-                  <a:schemeClr val="tx1"/>
-                </a:solidFill>
-                <a:effectLst/>
-                <a:latin typeface="Times New Roman" panose="02020603050405020304" pitchFamily="18" charset="0"/>
-                <a:cs typeface="Times New Roman" panose="02020603050405020304" pitchFamily="18" charset="0"/>
-              </a:rPr>
-              <a:t>Rendering</a:t>
-            </a:r>
-            <a:r>
-              <a:rPr kumimoji="0" lang="ru-RU" altLang="ru-RU" sz="2400" b="0" i="0" u="none" strike="noStrike" cap="none" normalizeH="0" baseline="0" dirty="0">
-                <a:ln>
-                  <a:noFill/>
-                </a:ln>
-                <a:solidFill>
-                  <a:schemeClr val="tx1"/>
-                </a:solidFill>
-                <a:effectLst/>
-                <a:latin typeface="Times New Roman" panose="02020603050405020304" pitchFamily="18" charset="0"/>
                 <a:cs typeface="Times New Roman" panose="02020603050405020304" pitchFamily="18" charset="0"/>
               </a:rPr>
               <a:t> + реактивные компоненты без тяжелых JS-фреймворков).</a:t>
@@ -4295,27 +4324,940 @@
 </p:sld>
 </file>
 
+<file path=ppt/slides/slide4.xml><?xml version="1.0" encoding="utf-8"?>
+<p:sld xmlns:a="http://schemas.openxmlformats.org/drawingml/2006/main" xmlns:r="http://schemas.openxmlformats.org/officeDocument/2006/relationships" xmlns:p="http://schemas.openxmlformats.org/presentationml/2006/main">
+  <p:cSld>
+    <p:spTree>
+      <p:nvGrpSpPr>
+        <p:cNvPr id="1" name=""/>
+        <p:cNvGrpSpPr/>
+        <p:nvPr/>
+      </p:nvGrpSpPr>
+      <p:grpSpPr>
+        <a:xfrm>
+          <a:off x="0" y="0"/>
+          <a:ext cx="0" cy="0"/>
+          <a:chOff x="0" y="0"/>
+          <a:chExt cx="0" cy="0"/>
+        </a:xfrm>
+      </p:grpSpPr>
+      <p:sp>
+        <p:nvSpPr>
+          <p:cNvPr id="2" name="Заголовок 1">
+            <a:extLst>
+              <a:ext uri="{FF2B5EF4-FFF2-40B4-BE49-F238E27FC236}">
+                <a16:creationId xmlns:a16="http://schemas.microsoft.com/office/drawing/2014/main" id="{2F5B340E-3ABD-18F8-3F9F-821EB6EFDEBA}"/>
+              </a:ext>
+            </a:extLst>
+          </p:cNvPr>
+          <p:cNvSpPr>
+            <a:spLocks noGrp="1"/>
+          </p:cNvSpPr>
+          <p:nvPr>
+            <p:ph type="title"/>
+          </p:nvPr>
+        </p:nvSpPr>
+        <p:spPr/>
+        <p:txBody>
+          <a:bodyPr/>
+          <a:lstStyle/>
+          <a:p>
+            <a:r>
+              <a:rPr lang="ru-RU" dirty="0"/>
+              <a:t>Архитектура базы данных и подсистема безопасности</a:t>
+            </a:r>
+          </a:p>
+        </p:txBody>
+      </p:sp>
+      <p:sp>
+        <p:nvSpPr>
+          <p:cNvPr id="3" name="Объект 2">
+            <a:extLst>
+              <a:ext uri="{FF2B5EF4-FFF2-40B4-BE49-F238E27FC236}">
+                <a16:creationId xmlns:a16="http://schemas.microsoft.com/office/drawing/2014/main" id="{DF5DBDF8-0574-FFC3-0D54-7D75DC1F335B}"/>
+              </a:ext>
+            </a:extLst>
+          </p:cNvPr>
+          <p:cNvSpPr>
+            <a:spLocks noGrp="1"/>
+          </p:cNvSpPr>
+          <p:nvPr>
+            <p:ph idx="1"/>
+          </p:nvPr>
+        </p:nvSpPr>
+        <p:spPr>
+          <a:xfrm>
+            <a:off x="7847903" y="2070250"/>
+            <a:ext cx="4037162" cy="5167312"/>
+          </a:xfrm>
+        </p:spPr>
+        <p:txBody>
+          <a:bodyPr>
+            <a:normAutofit/>
+          </a:bodyPr>
+          <a:lstStyle/>
+          <a:p>
+            <a:pPr marL="0" indent="0">
+              <a:buNone/>
+            </a:pPr>
+            <a:r>
+              <a:rPr lang="ru-RU" dirty="0"/>
+              <a:t>Выделено 5 ключевых наборов данных (</a:t>
+            </a:r>
+            <a:r>
+              <a:rPr lang="ru-RU" dirty="0" err="1"/>
+              <a:t>DbSet</a:t>
+            </a:r>
+            <a:r>
+              <a:rPr lang="ru-RU" dirty="0"/>
+              <a:t>):</a:t>
+            </a:r>
+          </a:p>
+          <a:p>
+            <a:r>
+              <a:rPr lang="ru-RU" dirty="0" err="1"/>
+              <a:t>AppUser</a:t>
+            </a:r>
+            <a:r>
+              <a:rPr lang="ru-RU" dirty="0"/>
+              <a:t> (</a:t>
+            </a:r>
+            <a:r>
+              <a:rPr lang="ru-RU" dirty="0" err="1"/>
+              <a:t>кастомный</a:t>
+            </a:r>
+            <a:r>
+              <a:rPr lang="ru-RU" dirty="0"/>
+              <a:t> профиль сотрудника: имя, фамилия, связи).</a:t>
+            </a:r>
+          </a:p>
+          <a:p>
+            <a:r>
+              <a:rPr lang="ru-RU" dirty="0"/>
+              <a:t>Companies и </a:t>
+            </a:r>
+            <a:r>
+              <a:rPr lang="ru-RU" dirty="0" err="1"/>
+              <a:t>Contacts</a:t>
+            </a:r>
+            <a:r>
+              <a:rPr lang="ru-RU" dirty="0"/>
+              <a:t> (база клиентов).</a:t>
+            </a:r>
+          </a:p>
+          <a:p>
+            <a:r>
+              <a:rPr lang="ru-RU" dirty="0" err="1"/>
+              <a:t>Deals</a:t>
+            </a:r>
+            <a:r>
+              <a:rPr lang="ru-RU" dirty="0"/>
+              <a:t> (сделки с 4 фиксированными статусами).</a:t>
+            </a:r>
+          </a:p>
+          <a:p>
+            <a:r>
+              <a:rPr lang="ru-RU" dirty="0" err="1"/>
+              <a:t>Activities</a:t>
+            </a:r>
+            <a:r>
+              <a:rPr lang="ru-RU" dirty="0"/>
+              <a:t> (сквозной лог коммуникаций).</a:t>
+            </a:r>
+          </a:p>
+          <a:p>
+            <a:endParaRPr lang="ru-RU" dirty="0"/>
+          </a:p>
+        </p:txBody>
+      </p:sp>
+      <p:pic>
+        <p:nvPicPr>
+          <p:cNvPr id="5" name="Рисунок 4" descr="Изображение выглядит как текст, снимок экрана, диаграмма, программное обеспечение&#10;&#10;Контент, сгенерированный ИИ, может содержать ошибки.">
+            <a:extLst>
+              <a:ext uri="{FF2B5EF4-FFF2-40B4-BE49-F238E27FC236}">
+                <a16:creationId xmlns:a16="http://schemas.microsoft.com/office/drawing/2014/main" id="{662D4DBE-AEF9-2229-45DE-73E3FF0CD3AA}"/>
+              </a:ext>
+            </a:extLst>
+          </p:cNvPr>
+          <p:cNvPicPr>
+            <a:picLocks noChangeAspect="1"/>
+          </p:cNvPicPr>
+          <p:nvPr/>
+        </p:nvPicPr>
+        <p:blipFill>
+          <a:blip r:embed="rId2">
+            <a:extLst>
+              <a:ext uri="{28A0092B-C50C-407E-A947-70E740481C1C}">
+                <a14:useLocalDpi xmlns:a14="http://schemas.microsoft.com/office/drawing/2010/main" val="0"/>
+              </a:ext>
+            </a:extLst>
+          </a:blip>
+          <a:stretch>
+            <a:fillRect/>
+          </a:stretch>
+        </p:blipFill>
+        <p:spPr>
+          <a:xfrm>
+            <a:off x="306935" y="2044362"/>
+            <a:ext cx="7569515" cy="4399471"/>
+          </a:xfrm>
+          <a:prstGeom prst="rect">
+            <a:avLst/>
+          </a:prstGeom>
+        </p:spPr>
+      </p:pic>
+      <p:sp>
+        <p:nvSpPr>
+          <p:cNvPr id="9" name="TextBox 8">
+            <a:extLst>
+              <a:ext uri="{FF2B5EF4-FFF2-40B4-BE49-F238E27FC236}">
+                <a16:creationId xmlns:a16="http://schemas.microsoft.com/office/drawing/2014/main" id="{C4ABDEB7-8035-A3FC-045E-E952E37F0AFD}"/>
+              </a:ext>
+            </a:extLst>
+          </p:cNvPr>
+          <p:cNvSpPr txBox="1"/>
+          <p:nvPr/>
+        </p:nvSpPr>
+        <p:spPr>
+          <a:xfrm>
+            <a:off x="71888" y="1582697"/>
+            <a:ext cx="12048224" cy="461665"/>
+          </a:xfrm>
+          <a:prstGeom prst="rect">
+            <a:avLst/>
+          </a:prstGeom>
+          <a:noFill/>
+        </p:spPr>
+        <p:txBody>
+          <a:bodyPr wrap="square">
+            <a:spAutoFit/>
+          </a:bodyPr>
+          <a:lstStyle/>
+          <a:p>
+            <a:pPr marL="0" indent="0">
+              <a:buNone/>
+            </a:pPr>
+            <a:r>
+              <a:rPr lang="ru-RU" sz="2400" dirty="0">
+                <a:solidFill>
+                  <a:srgbClr val="4A5568"/>
+                </a:solidFill>
+                <a:latin typeface="Inter 24pt Regular" panose="02000503000000020004" pitchFamily="2" charset="0"/>
+                <a:ea typeface="Inter 24pt Regular" panose="02000503000000020004" pitchFamily="2" charset="0"/>
+              </a:rPr>
+              <a:t>Использование встроенной подсистемы безопасности ASP.NET Core </a:t>
+            </a:r>
+            <a:r>
+              <a:rPr lang="en-US" sz="2400" dirty="0">
+                <a:solidFill>
+                  <a:srgbClr val="4A5568"/>
+                </a:solidFill>
+                <a:latin typeface="Inter 24pt Regular" panose="02000503000000020004" pitchFamily="2" charset="0"/>
+                <a:ea typeface="Inter 24pt Regular" panose="02000503000000020004" pitchFamily="2" charset="0"/>
+              </a:rPr>
+              <a:t>Identity</a:t>
+            </a:r>
+            <a:r>
+              <a:rPr lang="ru-RU" sz="2400" dirty="0">
+                <a:solidFill>
+                  <a:srgbClr val="4A5568"/>
+                </a:solidFill>
+                <a:latin typeface="Inter 24pt Regular" panose="02000503000000020004" pitchFamily="2" charset="0"/>
+                <a:ea typeface="Inter 24pt Regular" panose="02000503000000020004" pitchFamily="2" charset="0"/>
+              </a:rPr>
+              <a:t>.</a:t>
+            </a:r>
+          </a:p>
+        </p:txBody>
+      </p:sp>
+    </p:spTree>
+    <p:extLst>
+      <p:ext uri="{BB962C8B-B14F-4D97-AF65-F5344CB8AC3E}">
+        <p14:creationId xmlns:p14="http://schemas.microsoft.com/office/powerpoint/2010/main" val="419326750"/>
+      </p:ext>
+    </p:extLst>
+  </p:cSld>
+  <p:clrMapOvr>
+    <a:masterClrMapping/>
+  </p:clrMapOvr>
+</p:sld>
+</file>
+
+<file path=ppt/slides/slide5.xml><?xml version="1.0" encoding="utf-8"?>
+<p:sld xmlns:a="http://schemas.openxmlformats.org/drawingml/2006/main" xmlns:r="http://schemas.openxmlformats.org/officeDocument/2006/relationships" xmlns:p="http://schemas.openxmlformats.org/presentationml/2006/main">
+  <p:cSld>
+    <p:spTree>
+      <p:nvGrpSpPr>
+        <p:cNvPr id="1" name=""/>
+        <p:cNvGrpSpPr/>
+        <p:nvPr/>
+      </p:nvGrpSpPr>
+      <p:grpSpPr>
+        <a:xfrm>
+          <a:off x="0" y="0"/>
+          <a:ext cx="0" cy="0"/>
+          <a:chOff x="0" y="0"/>
+          <a:chExt cx="0" cy="0"/>
+        </a:xfrm>
+      </p:grpSpPr>
+      <p:sp>
+        <p:nvSpPr>
+          <p:cNvPr id="2" name="Заголовок 1">
+            <a:extLst>
+              <a:ext uri="{FF2B5EF4-FFF2-40B4-BE49-F238E27FC236}">
+                <a16:creationId xmlns:a16="http://schemas.microsoft.com/office/drawing/2014/main" id="{6B69B670-60FF-0972-2045-BEE8D16647B0}"/>
+              </a:ext>
+            </a:extLst>
+          </p:cNvPr>
+          <p:cNvSpPr>
+            <a:spLocks noGrp="1"/>
+          </p:cNvSpPr>
+          <p:nvPr>
+            <p:ph type="title"/>
+          </p:nvPr>
+        </p:nvSpPr>
+        <p:spPr/>
+        <p:txBody>
+          <a:bodyPr/>
+          <a:lstStyle/>
+          <a:p>
+            <a:r>
+              <a:rPr lang="ru-RU" dirty="0"/>
+              <a:t>Бизнес-логика и Сервисный слой (Архитектура кода)</a:t>
+            </a:r>
+          </a:p>
+        </p:txBody>
+      </p:sp>
+      <p:sp>
+        <p:nvSpPr>
+          <p:cNvPr id="3" name="Объект 2">
+            <a:extLst>
+              <a:ext uri="{FF2B5EF4-FFF2-40B4-BE49-F238E27FC236}">
+                <a16:creationId xmlns:a16="http://schemas.microsoft.com/office/drawing/2014/main" id="{035ECE69-FFBD-0AC6-50BB-33E7CA508F77}"/>
+              </a:ext>
+            </a:extLst>
+          </p:cNvPr>
+          <p:cNvSpPr>
+            <a:spLocks noGrp="1"/>
+          </p:cNvSpPr>
+          <p:nvPr>
+            <p:ph idx="1"/>
+          </p:nvPr>
+        </p:nvSpPr>
+        <p:spPr>
+          <a:xfrm>
+            <a:off x="838200" y="2277374"/>
+            <a:ext cx="10515600" cy="4020358"/>
+          </a:xfrm>
+        </p:spPr>
+        <p:txBody>
+          <a:bodyPr/>
+          <a:lstStyle/>
+          <a:p>
+            <a:r>
+              <a:rPr lang="ru-RU" dirty="0"/>
+              <a:t>Разделение зон ответственности (</a:t>
+            </a:r>
+            <a:r>
+              <a:rPr lang="ru-RU" dirty="0" err="1"/>
+              <a:t>Separation</a:t>
+            </a:r>
+            <a:r>
+              <a:rPr lang="ru-RU" dirty="0"/>
+              <a:t> </a:t>
+            </a:r>
+            <a:r>
+              <a:rPr lang="ru-RU" dirty="0" err="1"/>
+              <a:t>of</a:t>
+            </a:r>
+            <a:r>
+              <a:rPr lang="ru-RU" dirty="0"/>
+              <a:t> </a:t>
+            </a:r>
+            <a:r>
+              <a:rPr lang="ru-RU" dirty="0" err="1"/>
+              <a:t>Concerns</a:t>
+            </a:r>
+            <a:r>
+              <a:rPr lang="ru-RU" dirty="0"/>
+              <a:t>).</a:t>
+            </a:r>
+          </a:p>
+          <a:p>
+            <a:endParaRPr lang="ru-RU" dirty="0"/>
+          </a:p>
+          <a:p>
+            <a:r>
+              <a:rPr lang="ru-RU" dirty="0"/>
+              <a:t>Тонкие контроллеры: отвечают только за HTTP-маршрутизацию.</a:t>
+            </a:r>
+          </a:p>
+          <a:p>
+            <a:endParaRPr lang="ru-RU" dirty="0"/>
+          </a:p>
+          <a:p>
+            <a:r>
+              <a:rPr lang="ru-RU" dirty="0"/>
+              <a:t>Сервисный слой (</a:t>
+            </a:r>
+            <a:r>
+              <a:rPr lang="ru-RU" dirty="0" err="1"/>
+              <a:t>IDealService</a:t>
+            </a:r>
+            <a:r>
+              <a:rPr lang="ru-RU" dirty="0"/>
+              <a:t>): инкапсулирует всю бизнес-логику, транзакции в БД и маппинг в DTO.</a:t>
+            </a:r>
+          </a:p>
+          <a:p>
+            <a:endParaRPr lang="ru-RU" dirty="0"/>
+          </a:p>
+          <a:p>
+            <a:r>
+              <a:rPr lang="ru-RU" dirty="0"/>
+              <a:t>Оптимизация производительности с помощью </a:t>
+            </a:r>
+            <a:r>
+              <a:rPr lang="ru-RU" dirty="0" err="1"/>
+              <a:t>AsNoTracking</a:t>
+            </a:r>
+            <a:r>
+              <a:rPr lang="ru-RU" dirty="0"/>
+              <a:t>() для операций чтения.</a:t>
+            </a:r>
+          </a:p>
+        </p:txBody>
+      </p:sp>
+    </p:spTree>
+    <p:extLst>
+      <p:ext uri="{BB962C8B-B14F-4D97-AF65-F5344CB8AC3E}">
+        <p14:creationId xmlns:p14="http://schemas.microsoft.com/office/powerpoint/2010/main" val="3219801976"/>
+      </p:ext>
+    </p:extLst>
+  </p:cSld>
+  <p:clrMapOvr>
+    <a:masterClrMapping/>
+  </p:clrMapOvr>
+</p:sld>
+</file>
+
+<file path=ppt/slides/slide6.xml><?xml version="1.0" encoding="utf-8"?>
+<p:sld xmlns:a="http://schemas.openxmlformats.org/drawingml/2006/main" xmlns:r="http://schemas.openxmlformats.org/officeDocument/2006/relationships" xmlns:p="http://schemas.openxmlformats.org/presentationml/2006/main">
+  <p:cSld>
+    <p:spTree>
+      <p:nvGrpSpPr>
+        <p:cNvPr id="1" name=""/>
+        <p:cNvGrpSpPr/>
+        <p:nvPr/>
+      </p:nvGrpSpPr>
+      <p:grpSpPr>
+        <a:xfrm>
+          <a:off x="0" y="0"/>
+          <a:ext cx="0" cy="0"/>
+          <a:chOff x="0" y="0"/>
+          <a:chExt cx="0" cy="0"/>
+        </a:xfrm>
+      </p:grpSpPr>
+      <p:sp>
+        <p:nvSpPr>
+          <p:cNvPr id="2" name="Заголовок 1">
+            <a:extLst>
+              <a:ext uri="{FF2B5EF4-FFF2-40B4-BE49-F238E27FC236}">
+                <a16:creationId xmlns:a16="http://schemas.microsoft.com/office/drawing/2014/main" id="{7DC6D022-EDEC-9748-E2ED-D1D2018BE8C7}"/>
+              </a:ext>
+            </a:extLst>
+          </p:cNvPr>
+          <p:cNvSpPr>
+            <a:spLocks noGrp="1"/>
+          </p:cNvSpPr>
+          <p:nvPr>
+            <p:ph type="title"/>
+          </p:nvPr>
+        </p:nvSpPr>
+        <p:spPr/>
+        <p:txBody>
+          <a:bodyPr/>
+          <a:lstStyle/>
+          <a:p>
+            <a:r>
+              <a:rPr lang="ru-RU" dirty="0"/>
+              <a:t>Реализация интерактивной воронки продаж (Канбан)</a:t>
+            </a:r>
+          </a:p>
+        </p:txBody>
+      </p:sp>
+      <p:sp>
+        <p:nvSpPr>
+          <p:cNvPr id="3" name="Объект 2">
+            <a:extLst>
+              <a:ext uri="{FF2B5EF4-FFF2-40B4-BE49-F238E27FC236}">
+                <a16:creationId xmlns:a16="http://schemas.microsoft.com/office/drawing/2014/main" id="{853FC786-798B-F344-C446-458EAE0BC352}"/>
+              </a:ext>
+            </a:extLst>
+          </p:cNvPr>
+          <p:cNvSpPr>
+            <a:spLocks noGrp="1"/>
+          </p:cNvSpPr>
+          <p:nvPr>
+            <p:ph idx="1"/>
+          </p:nvPr>
+        </p:nvSpPr>
+        <p:spPr>
+          <a:xfrm>
+            <a:off x="1" y="1827168"/>
+            <a:ext cx="3243532" cy="4894352"/>
+          </a:xfrm>
+        </p:spPr>
+        <p:txBody>
+          <a:bodyPr>
+            <a:normAutofit lnSpcReduction="10000"/>
+          </a:bodyPr>
+          <a:lstStyle/>
+          <a:p>
+            <a:r>
+              <a:rPr lang="ru-RU" dirty="0"/>
+              <a:t>Жизненный цикл сделки строго ограничен 4 статусами: </a:t>
+            </a:r>
+            <a:r>
+              <a:rPr lang="ru-RU" dirty="0" err="1"/>
+              <a:t>new</a:t>
+            </a:r>
+            <a:r>
+              <a:rPr lang="ru-RU" dirty="0"/>
+              <a:t>, </a:t>
+            </a:r>
+            <a:r>
+              <a:rPr lang="ru-RU" dirty="0" err="1"/>
+              <a:t>in</a:t>
+            </a:r>
+            <a:r>
+              <a:rPr lang="ru-RU" dirty="0"/>
+              <a:t> </a:t>
+            </a:r>
+            <a:r>
+              <a:rPr lang="ru-RU" dirty="0" err="1"/>
+              <a:t>progress</a:t>
+            </a:r>
+            <a:r>
+              <a:rPr lang="ru-RU" dirty="0"/>
+              <a:t>, </a:t>
+            </a:r>
+            <a:r>
+              <a:rPr lang="ru-RU" dirty="0" err="1"/>
+              <a:t>won</a:t>
+            </a:r>
+            <a:r>
+              <a:rPr lang="ru-RU" dirty="0"/>
+              <a:t>, </a:t>
+            </a:r>
+            <a:r>
+              <a:rPr lang="ru-RU" dirty="0" err="1"/>
+              <a:t>lost</a:t>
+            </a:r>
+            <a:r>
+              <a:rPr lang="ru-RU" dirty="0"/>
+              <a:t>.</a:t>
+            </a:r>
+          </a:p>
+          <a:p>
+            <a:r>
+              <a:rPr lang="ru-RU" dirty="0"/>
+              <a:t>Реализация </a:t>
+            </a:r>
+            <a:r>
+              <a:rPr lang="ru-RU" dirty="0" err="1"/>
+              <a:t>Drag-and-Drop</a:t>
+            </a:r>
+            <a:r>
+              <a:rPr lang="ru-RU" dirty="0"/>
+              <a:t> на клиенте через Sortable.js.</a:t>
+            </a:r>
+          </a:p>
+          <a:p>
+            <a:r>
+              <a:rPr lang="ru-RU" dirty="0"/>
+              <a:t>Асинхронное обновление через </a:t>
+            </a:r>
+            <a:r>
+              <a:rPr lang="ru-RU" dirty="0" err="1"/>
+              <a:t>htmx</a:t>
+            </a:r>
+            <a:r>
+              <a:rPr lang="ru-RU" dirty="0"/>
+              <a:t> с частичным рендерингом (</a:t>
+            </a:r>
+            <a:r>
+              <a:rPr lang="ru-RU" dirty="0" err="1"/>
+              <a:t>Partial</a:t>
+            </a:r>
+            <a:r>
+              <a:rPr lang="ru-RU" dirty="0"/>
+              <a:t> View).</a:t>
+            </a:r>
+          </a:p>
+          <a:p>
+            <a:endParaRPr lang="ru-RU" dirty="0"/>
+          </a:p>
+        </p:txBody>
+      </p:sp>
+      <p:pic>
+        <p:nvPicPr>
+          <p:cNvPr id="6" name="Рисунок 5" descr="Изображение выглядит как текст, снимок экрана, программное обеспечение, дисплей&#10;&#10;Контент, сгенерированный ИИ, может содержать ошибки.">
+            <a:extLst>
+              <a:ext uri="{FF2B5EF4-FFF2-40B4-BE49-F238E27FC236}">
+                <a16:creationId xmlns:a16="http://schemas.microsoft.com/office/drawing/2014/main" id="{02327310-CBE7-E28A-2172-5E3AD29C96BF}"/>
+              </a:ext>
+            </a:extLst>
+          </p:cNvPr>
+          <p:cNvPicPr>
+            <a:picLocks noChangeAspect="1"/>
+          </p:cNvPicPr>
+          <p:nvPr/>
+        </p:nvPicPr>
+        <p:blipFill>
+          <a:blip r:embed="rId2">
+            <a:extLst>
+              <a:ext uri="{28A0092B-C50C-407E-A947-70E740481C1C}">
+                <a14:useLocalDpi xmlns:a14="http://schemas.microsoft.com/office/drawing/2010/main" val="0"/>
+              </a:ext>
+            </a:extLst>
+          </a:blip>
+          <a:stretch>
+            <a:fillRect/>
+          </a:stretch>
+        </p:blipFill>
+        <p:spPr>
+          <a:xfrm>
+            <a:off x="3035538" y="1670346"/>
+            <a:ext cx="8558364" cy="5187654"/>
+          </a:xfrm>
+          <a:prstGeom prst="rect">
+            <a:avLst/>
+          </a:prstGeom>
+        </p:spPr>
+      </p:pic>
+    </p:spTree>
+    <p:extLst>
+      <p:ext uri="{BB962C8B-B14F-4D97-AF65-F5344CB8AC3E}">
+        <p14:creationId xmlns:p14="http://schemas.microsoft.com/office/powerpoint/2010/main" val="1204847529"/>
+      </p:ext>
+    </p:extLst>
+  </p:cSld>
+  <p:clrMapOvr>
+    <a:masterClrMapping/>
+  </p:clrMapOvr>
+</p:sld>
+</file>
+
+<file path=ppt/slides/slide7.xml><?xml version="1.0" encoding="utf-8"?>
+<p:sld xmlns:a="http://schemas.openxmlformats.org/drawingml/2006/main" xmlns:r="http://schemas.openxmlformats.org/officeDocument/2006/relationships" xmlns:p="http://schemas.openxmlformats.org/presentationml/2006/main">
+  <p:cSld>
+    <p:spTree>
+      <p:nvGrpSpPr>
+        <p:cNvPr id="1" name=""/>
+        <p:cNvGrpSpPr/>
+        <p:nvPr/>
+      </p:nvGrpSpPr>
+      <p:grpSpPr>
+        <a:xfrm>
+          <a:off x="0" y="0"/>
+          <a:ext cx="0" cy="0"/>
+          <a:chOff x="0" y="0"/>
+          <a:chExt cx="0" cy="0"/>
+        </a:xfrm>
+      </p:grpSpPr>
+      <p:sp>
+        <p:nvSpPr>
+          <p:cNvPr id="2" name="Заголовок 1">
+            <a:extLst>
+              <a:ext uri="{FF2B5EF4-FFF2-40B4-BE49-F238E27FC236}">
+                <a16:creationId xmlns:a16="http://schemas.microsoft.com/office/drawing/2014/main" id="{FEED2171-3F0F-F120-7253-4D2921934204}"/>
+              </a:ext>
+            </a:extLst>
+          </p:cNvPr>
+          <p:cNvSpPr>
+            <a:spLocks noGrp="1"/>
+          </p:cNvSpPr>
+          <p:nvPr>
+            <p:ph type="title"/>
+          </p:nvPr>
+        </p:nvSpPr>
+        <p:spPr/>
+        <p:txBody>
+          <a:bodyPr/>
+          <a:lstStyle/>
+          <a:p>
+            <a:r>
+              <a:rPr lang="ru-RU" dirty="0"/>
+              <a:t>Функциональные возможности системы</a:t>
+            </a:r>
+          </a:p>
+        </p:txBody>
+      </p:sp>
+      <p:sp>
+        <p:nvSpPr>
+          <p:cNvPr id="3" name="Объект 2">
+            <a:extLst>
+              <a:ext uri="{FF2B5EF4-FFF2-40B4-BE49-F238E27FC236}">
+                <a16:creationId xmlns:a16="http://schemas.microsoft.com/office/drawing/2014/main" id="{D6429BF6-6829-34A6-C6E0-CCCF4EE1B394}"/>
+              </a:ext>
+            </a:extLst>
+          </p:cNvPr>
+          <p:cNvSpPr>
+            <a:spLocks noGrp="1"/>
+          </p:cNvSpPr>
+          <p:nvPr>
+            <p:ph idx="1"/>
+          </p:nvPr>
+        </p:nvSpPr>
+        <p:spPr>
+          <a:xfrm>
+            <a:off x="346494" y="1920515"/>
+            <a:ext cx="7020464" cy="4351338"/>
+          </a:xfrm>
+        </p:spPr>
+        <p:txBody>
+          <a:bodyPr/>
+          <a:lstStyle/>
+          <a:p>
+            <a:r>
+              <a:rPr lang="ru-RU" dirty="0" err="1"/>
+              <a:t>Дашборд</a:t>
+            </a:r>
+            <a:r>
+              <a:rPr lang="ru-RU" dirty="0"/>
+              <a:t> аналитики: Расчет KPI, конверсии (</a:t>
+            </a:r>
+            <a:r>
+              <a:rPr lang="ru-RU" dirty="0" err="1"/>
+              <a:t>Win</a:t>
+            </a:r>
+            <a:r>
+              <a:rPr lang="ru-RU" dirty="0"/>
+              <a:t> Rate) и графики Chart.js.</a:t>
+            </a:r>
+          </a:p>
+          <a:p>
+            <a:endParaRPr lang="ru-RU" dirty="0"/>
+          </a:p>
+          <a:p>
+            <a:r>
+              <a:rPr lang="ru-RU" dirty="0"/>
+              <a:t>Умная лента активностей: Динамический фильтр задач с переключением сетки (список / плитка) на базе CSS-анимаций.</a:t>
+            </a:r>
+          </a:p>
+          <a:p>
+            <a:pPr marL="0" indent="0">
+              <a:buNone/>
+            </a:pPr>
+            <a:endParaRPr lang="ru-RU" dirty="0"/>
+          </a:p>
+          <a:p>
+            <a:r>
+              <a:rPr lang="ru-RU" dirty="0"/>
+              <a:t>Панель администратора: Контроль заблокированных пользователей и управление правами менеджеров.</a:t>
+            </a:r>
+          </a:p>
+        </p:txBody>
+      </p:sp>
+      <p:pic>
+        <p:nvPicPr>
+          <p:cNvPr id="6" name="Рисунок 5" descr="Изображение выглядит как текст, снимок экрана, диаграмма, линия&#10;&#10;Контент, сгенерированный ИИ, может содержать ошибки.">
+            <a:extLst>
+              <a:ext uri="{FF2B5EF4-FFF2-40B4-BE49-F238E27FC236}">
+                <a16:creationId xmlns:a16="http://schemas.microsoft.com/office/drawing/2014/main" id="{145D04B0-F671-6CA9-1432-FD9ACF087771}"/>
+              </a:ext>
+            </a:extLst>
+          </p:cNvPr>
+          <p:cNvPicPr>
+            <a:picLocks noChangeAspect="1"/>
+          </p:cNvPicPr>
+          <p:nvPr/>
+        </p:nvPicPr>
+        <p:blipFill>
+          <a:blip r:embed="rId2">
+            <a:extLst>
+              <a:ext uri="{28A0092B-C50C-407E-A947-70E740481C1C}">
+                <a14:useLocalDpi xmlns:a14="http://schemas.microsoft.com/office/drawing/2010/main" val="0"/>
+              </a:ext>
+            </a:extLst>
+          </a:blip>
+          <a:stretch>
+            <a:fillRect/>
+          </a:stretch>
+        </p:blipFill>
+        <p:spPr>
+          <a:xfrm>
+            <a:off x="7444956" y="1976078"/>
+            <a:ext cx="4400550" cy="4295775"/>
+          </a:xfrm>
+          <a:prstGeom prst="rect">
+            <a:avLst/>
+          </a:prstGeom>
+        </p:spPr>
+      </p:pic>
+    </p:spTree>
+    <p:extLst>
+      <p:ext uri="{BB962C8B-B14F-4D97-AF65-F5344CB8AC3E}">
+        <p14:creationId xmlns:p14="http://schemas.microsoft.com/office/powerpoint/2010/main" val="483235749"/>
+      </p:ext>
+    </p:extLst>
+  </p:cSld>
+  <p:clrMapOvr>
+    <a:masterClrMapping/>
+  </p:clrMapOvr>
+</p:sld>
+</file>
+
+<file path=ppt/slides/slide8.xml><?xml version="1.0" encoding="utf-8"?>
+<p:sld xmlns:a="http://schemas.openxmlformats.org/drawingml/2006/main" xmlns:r="http://schemas.openxmlformats.org/officeDocument/2006/relationships" xmlns:p="http://schemas.openxmlformats.org/presentationml/2006/main">
+  <p:cSld>
+    <p:spTree>
+      <p:nvGrpSpPr>
+        <p:cNvPr id="1" name=""/>
+        <p:cNvGrpSpPr/>
+        <p:nvPr/>
+      </p:nvGrpSpPr>
+      <p:grpSpPr>
+        <a:xfrm>
+          <a:off x="0" y="0"/>
+          <a:ext cx="0" cy="0"/>
+          <a:chOff x="0" y="0"/>
+          <a:chExt cx="0" cy="0"/>
+        </a:xfrm>
+      </p:grpSpPr>
+      <p:sp>
+        <p:nvSpPr>
+          <p:cNvPr id="2" name="Заголовок 1">
+            <a:extLst>
+              <a:ext uri="{FF2B5EF4-FFF2-40B4-BE49-F238E27FC236}">
+                <a16:creationId xmlns:a16="http://schemas.microsoft.com/office/drawing/2014/main" id="{47CD11D1-CC4C-968E-1CC2-2E44C6AFC59F}"/>
+              </a:ext>
+            </a:extLst>
+          </p:cNvPr>
+          <p:cNvSpPr>
+            <a:spLocks noGrp="1"/>
+          </p:cNvSpPr>
+          <p:nvPr>
+            <p:ph type="title"/>
+          </p:nvPr>
+        </p:nvSpPr>
+        <p:spPr/>
+        <p:txBody>
+          <a:bodyPr/>
+          <a:lstStyle/>
+          <a:p>
+            <a:r>
+              <a:rPr lang="ru-RU" dirty="0"/>
+              <a:t>Заключение</a:t>
+            </a:r>
+          </a:p>
+        </p:txBody>
+      </p:sp>
+      <p:sp>
+        <p:nvSpPr>
+          <p:cNvPr id="3" name="Объект 2">
+            <a:extLst>
+              <a:ext uri="{FF2B5EF4-FFF2-40B4-BE49-F238E27FC236}">
+                <a16:creationId xmlns:a16="http://schemas.microsoft.com/office/drawing/2014/main" id="{A6C106A3-D540-BE69-A126-784A02264B7A}"/>
+              </a:ext>
+            </a:extLst>
+          </p:cNvPr>
+          <p:cNvSpPr>
+            <a:spLocks noGrp="1"/>
+          </p:cNvSpPr>
+          <p:nvPr>
+            <p:ph idx="1"/>
+          </p:nvPr>
+        </p:nvSpPr>
+        <p:spPr/>
+        <p:txBody>
+          <a:bodyPr/>
+          <a:lstStyle/>
+          <a:p>
+            <a:r>
+              <a:rPr lang="ru-RU" dirty="0"/>
+              <a:t>Результаты работы: Разработан полностью готовый к эксплуатации прототип CRM-системы с разделением ролей.</a:t>
+            </a:r>
+          </a:p>
+          <a:p>
+            <a:endParaRPr lang="ru-RU" dirty="0"/>
+          </a:p>
+          <a:p>
+            <a:r>
+              <a:rPr lang="ru-RU" dirty="0"/>
+              <a:t>Научно-практическая ценность: Продемонстрирована эффективность гибридного </a:t>
+            </a:r>
+            <a:r>
+              <a:rPr lang="ru-RU" dirty="0" err="1"/>
+              <a:t>фронтенда</a:t>
+            </a:r>
+            <a:r>
+              <a:rPr lang="ru-RU" dirty="0"/>
+              <a:t> (</a:t>
+            </a:r>
+            <a:r>
+              <a:rPr lang="ru-RU" dirty="0" err="1"/>
+              <a:t>htmx</a:t>
+            </a:r>
+            <a:r>
+              <a:rPr lang="ru-RU" dirty="0"/>
+              <a:t>) в </a:t>
+            </a:r>
+            <a:r>
+              <a:rPr lang="ru-RU" dirty="0" err="1"/>
+              <a:t>enterprise</a:t>
+            </a:r>
+            <a:r>
+              <a:rPr lang="ru-RU" dirty="0"/>
+              <a:t>-приложениях.</a:t>
+            </a:r>
+          </a:p>
+          <a:p>
+            <a:endParaRPr lang="ru-RU" dirty="0"/>
+          </a:p>
+          <a:p>
+            <a:r>
+              <a:rPr lang="ru-RU" dirty="0"/>
+              <a:t>Планы развития: Интеграция с почтовыми сервисами и внедрение ИИ-ассистента для автоматического анализа истории сделок.</a:t>
+            </a:r>
+          </a:p>
+        </p:txBody>
+      </p:sp>
+    </p:spTree>
+    <p:extLst>
+      <p:ext uri="{BB962C8B-B14F-4D97-AF65-F5344CB8AC3E}">
+        <p14:creationId xmlns:p14="http://schemas.microsoft.com/office/powerpoint/2010/main" val="3729302615"/>
+      </p:ext>
+    </p:extLst>
+  </p:cSld>
+  <p:clrMapOvr>
+    <a:masterClrMapping/>
+  </p:clrMapOvr>
+</p:sld>
+</file>
+
 <file path=ppt/theme/theme1.xml><?xml version="1.0" encoding="utf-8"?>
 <a:theme xmlns:a="http://schemas.openxmlformats.org/drawingml/2006/main" name="Тема Office">
   <a:themeElements>
-    <a:clrScheme name="Стандартная">
+    <a:clrScheme name="Другая 1">
       <a:dk1>
-        <a:sysClr val="windowText" lastClr="000000"/>
+        <a:srgbClr val="2D3748"/>
       </a:dk1>
       <a:lt1>
         <a:sysClr val="window" lastClr="FFFFFF"/>
       </a:lt1>
       <a:dk2>
-        <a:srgbClr val="44546A"/>
+        <a:srgbClr val="4A5568"/>
       </a:dk2>
       <a:lt2>
         <a:srgbClr val="E7E6E6"/>
       </a:lt2>
       <a:accent1>
-        <a:srgbClr val="4472C4"/>
+        <a:srgbClr val="2B6CB0"/>
       </a:accent1>
       <a:accent2>
-        <a:srgbClr val="ED7D31"/>
+        <a:srgbClr val="38B2AC"/>
       </a:accent2>
       <a:accent3>
         <a:srgbClr val="A5A5A5"/>
